--- a/Figures/Figure 1.pptx
+++ b/Figures/Figure 1.pptx
@@ -243,7 +243,7 @@
           <a:p>
             <a:fld id="{5BA77239-3AD1-4818-ADF0-0E18FF0CF020}" type="datetimeFigureOut">
               <a:rPr lang="en-GB" smtClean="0"/>
-              <a:t>18/03/2024</a:t>
+              <a:t>19/05/2024</a:t>
             </a:fld>
             <a:endParaRPr lang="en-GB"/>
           </a:p>
@@ -413,7 +413,7 @@
           <a:p>
             <a:fld id="{5BA77239-3AD1-4818-ADF0-0E18FF0CF020}" type="datetimeFigureOut">
               <a:rPr lang="en-GB" smtClean="0"/>
-              <a:t>18/03/2024</a:t>
+              <a:t>19/05/2024</a:t>
             </a:fld>
             <a:endParaRPr lang="en-GB"/>
           </a:p>
@@ -593,7 +593,7 @@
           <a:p>
             <a:fld id="{5BA77239-3AD1-4818-ADF0-0E18FF0CF020}" type="datetimeFigureOut">
               <a:rPr lang="en-GB" smtClean="0"/>
-              <a:t>18/03/2024</a:t>
+              <a:t>19/05/2024</a:t>
             </a:fld>
             <a:endParaRPr lang="en-GB"/>
           </a:p>
@@ -763,7 +763,7 @@
           <a:p>
             <a:fld id="{5BA77239-3AD1-4818-ADF0-0E18FF0CF020}" type="datetimeFigureOut">
               <a:rPr lang="en-GB" smtClean="0"/>
-              <a:t>18/03/2024</a:t>
+              <a:t>19/05/2024</a:t>
             </a:fld>
             <a:endParaRPr lang="en-GB"/>
           </a:p>
@@ -1007,7 +1007,7 @@
           <a:p>
             <a:fld id="{5BA77239-3AD1-4818-ADF0-0E18FF0CF020}" type="datetimeFigureOut">
               <a:rPr lang="en-GB" smtClean="0"/>
-              <a:t>18/03/2024</a:t>
+              <a:t>19/05/2024</a:t>
             </a:fld>
             <a:endParaRPr lang="en-GB"/>
           </a:p>
@@ -1239,7 +1239,7 @@
           <a:p>
             <a:fld id="{5BA77239-3AD1-4818-ADF0-0E18FF0CF020}" type="datetimeFigureOut">
               <a:rPr lang="en-GB" smtClean="0"/>
-              <a:t>18/03/2024</a:t>
+              <a:t>19/05/2024</a:t>
             </a:fld>
             <a:endParaRPr lang="en-GB"/>
           </a:p>
@@ -1606,7 +1606,7 @@
           <a:p>
             <a:fld id="{5BA77239-3AD1-4818-ADF0-0E18FF0CF020}" type="datetimeFigureOut">
               <a:rPr lang="en-GB" smtClean="0"/>
-              <a:t>18/03/2024</a:t>
+              <a:t>19/05/2024</a:t>
             </a:fld>
             <a:endParaRPr lang="en-GB"/>
           </a:p>
@@ -1724,7 +1724,7 @@
           <a:p>
             <a:fld id="{5BA77239-3AD1-4818-ADF0-0E18FF0CF020}" type="datetimeFigureOut">
               <a:rPr lang="en-GB" smtClean="0"/>
-              <a:t>18/03/2024</a:t>
+              <a:t>19/05/2024</a:t>
             </a:fld>
             <a:endParaRPr lang="en-GB"/>
           </a:p>
@@ -1819,7 +1819,7 @@
           <a:p>
             <a:fld id="{5BA77239-3AD1-4818-ADF0-0E18FF0CF020}" type="datetimeFigureOut">
               <a:rPr lang="en-GB" smtClean="0"/>
-              <a:t>18/03/2024</a:t>
+              <a:t>19/05/2024</a:t>
             </a:fld>
             <a:endParaRPr lang="en-GB"/>
           </a:p>
@@ -2096,7 +2096,7 @@
           <a:p>
             <a:fld id="{5BA77239-3AD1-4818-ADF0-0E18FF0CF020}" type="datetimeFigureOut">
               <a:rPr lang="en-GB" smtClean="0"/>
-              <a:t>18/03/2024</a:t>
+              <a:t>19/05/2024</a:t>
             </a:fld>
             <a:endParaRPr lang="en-GB"/>
           </a:p>
@@ -2353,7 +2353,7 @@
           <a:p>
             <a:fld id="{5BA77239-3AD1-4818-ADF0-0E18FF0CF020}" type="datetimeFigureOut">
               <a:rPr lang="en-GB" smtClean="0"/>
-              <a:t>18/03/2024</a:t>
+              <a:t>19/05/2024</a:t>
             </a:fld>
             <a:endParaRPr lang="en-GB"/>
           </a:p>
@@ -2566,7 +2566,7 @@
           <a:p>
             <a:fld id="{5BA77239-3AD1-4818-ADF0-0E18FF0CF020}" type="datetimeFigureOut">
               <a:rPr lang="en-GB" smtClean="0"/>
-              <a:t>18/03/2024</a:t>
+              <a:t>19/05/2024</a:t>
             </a:fld>
             <a:endParaRPr lang="en-GB"/>
           </a:p>
@@ -4151,7 +4151,7 @@
           <a:p>
             <a:pPr algn="ctr"/>
             <a:r>
-              <a:rPr lang="en-GB" sz="1300" dirty="0">
+              <a:rPr lang="en-GB" sz="1200" dirty="0">
                 <a:solidFill>
                   <a:sysClr val="windowText" lastClr="000000"/>
                 </a:solidFill>
@@ -4162,7 +4162,7 @@
           <a:p>
             <a:pPr algn="ctr"/>
             <a:r>
-              <a:rPr lang="en-GB" sz="1300" dirty="0">
+              <a:rPr lang="en-GB" sz="1200" dirty="0">
                 <a:solidFill>
                   <a:sysClr val="windowText" lastClr="000000"/>
                 </a:solidFill>
@@ -4173,7 +4173,7 @@
           <a:p>
             <a:pPr algn="ctr"/>
             <a:r>
-              <a:rPr lang="en-GB" sz="1300" dirty="0">
+              <a:rPr lang="en-GB" sz="1200" dirty="0">
                 <a:solidFill>
                   <a:sysClr val="windowText" lastClr="000000"/>
                 </a:solidFill>
@@ -4234,7 +4234,7 @@
           <a:p>
             <a:pPr algn="ctr"/>
             <a:r>
-              <a:rPr lang="en-GB" sz="1300" dirty="0">
+              <a:rPr lang="en-GB" sz="1200" dirty="0">
                 <a:solidFill>
                   <a:sysClr val="windowText" lastClr="000000"/>
                 </a:solidFill>
@@ -4245,7 +4245,7 @@
           <a:p>
             <a:pPr algn="ctr"/>
             <a:r>
-              <a:rPr lang="en-GB" sz="1300" dirty="0">
+              <a:rPr lang="en-GB" sz="1200" dirty="0">
                 <a:solidFill>
                   <a:sysClr val="windowText" lastClr="000000"/>
                 </a:solidFill>
@@ -4256,7 +4256,7 @@
           <a:p>
             <a:pPr algn="ctr"/>
             <a:r>
-              <a:rPr lang="en-GB" sz="1300" dirty="0">
+              <a:rPr lang="en-GB" sz="1200" dirty="0">
                 <a:solidFill>
                   <a:sysClr val="windowText" lastClr="000000"/>
                 </a:solidFill>
@@ -4317,7 +4317,7 @@
           <a:p>
             <a:pPr algn="ctr"/>
             <a:r>
-              <a:rPr lang="en-GB" sz="1300" dirty="0">
+              <a:rPr lang="en-GB" sz="1200" dirty="0">
                 <a:solidFill>
                   <a:sysClr val="windowText" lastClr="000000"/>
                 </a:solidFill>
@@ -4328,12 +4328,23 @@
           <a:p>
             <a:pPr algn="ctr"/>
             <a:r>
-              <a:rPr lang="en-GB" sz="1300" dirty="0">
+              <a:rPr lang="en-GB" sz="1200" dirty="0">
                 <a:solidFill>
                   <a:sysClr val="windowText" lastClr="000000"/>
                 </a:solidFill>
               </a:rPr>
-              <a:t>capitula</a:t>
+              <a:t>flower</a:t>
+            </a:r>
+          </a:p>
+          <a:p>
+            <a:pPr algn="ctr"/>
+            <a:r>
+              <a:rPr lang="en-GB" sz="1200" dirty="0">
+                <a:solidFill>
+                  <a:sysClr val="windowText" lastClr="000000"/>
+                </a:solidFill>
+              </a:rPr>
+              <a:t>heads</a:t>
             </a:r>
           </a:p>
         </p:txBody>
@@ -4389,18 +4400,29 @@
           <a:p>
             <a:pPr algn="ctr"/>
             <a:r>
-              <a:rPr lang="en-GB" sz="1300" dirty="0">
+              <a:rPr lang="en-GB" sz="1200" dirty="0">
                 <a:solidFill>
                   <a:sysClr val="windowText" lastClr="000000"/>
                 </a:solidFill>
               </a:rPr>
-              <a:t>Capitulum</a:t>
+              <a:t>Flower</a:t>
             </a:r>
           </a:p>
           <a:p>
             <a:pPr algn="ctr"/>
             <a:r>
-              <a:rPr lang="en-GB" sz="1300" dirty="0">
+              <a:rPr lang="en-GB" sz="1200" dirty="0">
+                <a:solidFill>
+                  <a:sysClr val="windowText" lastClr="000000"/>
+                </a:solidFill>
+              </a:rPr>
+              <a:t>head</a:t>
+            </a:r>
+          </a:p>
+          <a:p>
+            <a:pPr algn="ctr"/>
+            <a:r>
+              <a:rPr lang="en-GB" sz="1200" dirty="0">
                 <a:solidFill>
                   <a:sysClr val="windowText" lastClr="000000"/>
                 </a:solidFill>
@@ -4461,7 +4483,7 @@
           <a:p>
             <a:pPr algn="ctr"/>
             <a:r>
-              <a:rPr lang="en-GB" sz="1300" dirty="0">
+              <a:rPr lang="en-GB" sz="1200" dirty="0">
                 <a:solidFill>
                   <a:sysClr val="windowText" lastClr="000000"/>
                 </a:solidFill>
@@ -4472,7 +4494,7 @@
           <a:p>
             <a:pPr algn="ctr"/>
             <a:r>
-              <a:rPr lang="en-GB" sz="1300" dirty="0">
+              <a:rPr lang="en-GB" sz="1200" dirty="0">
                 <a:solidFill>
                   <a:sysClr val="windowText" lastClr="000000"/>
                 </a:solidFill>
@@ -4483,12 +4505,12 @@
           <a:p>
             <a:pPr algn="ctr"/>
             <a:r>
-              <a:rPr lang="en-GB" sz="1300" dirty="0">
+              <a:rPr lang="en-GB" sz="1200" dirty="0">
                 <a:solidFill>
                   <a:sysClr val="windowText" lastClr="000000"/>
                 </a:solidFill>
               </a:rPr>
-              <a:t>capitulum</a:t>
+              <a:t>flower head</a:t>
             </a:r>
           </a:p>
         </p:txBody>
@@ -4545,7 +4567,7 @@
           <a:p>
             <a:pPr algn="ctr"/>
             <a:r>
-              <a:rPr lang="en-GB" sz="1300" dirty="0">
+              <a:rPr lang="en-GB" sz="1200" dirty="0">
                 <a:solidFill>
                   <a:sysClr val="windowText" lastClr="000000"/>
                 </a:solidFill>
@@ -4556,7 +4578,7 @@
           <a:p>
             <a:pPr algn="ctr"/>
             <a:r>
-              <a:rPr lang="en-GB" sz="1300" dirty="0">
+              <a:rPr lang="en-GB" sz="1200" dirty="0">
                 <a:solidFill>
                   <a:sysClr val="windowText" lastClr="000000"/>
                 </a:solidFill>
@@ -4618,7 +4640,7 @@
           <a:p>
             <a:pPr algn="ctr"/>
             <a:r>
-              <a:rPr lang="en-GB" sz="1300" dirty="0">
+              <a:rPr lang="en-GB" sz="1200" dirty="0">
                 <a:solidFill>
                   <a:sysClr val="windowText" lastClr="000000"/>
                 </a:solidFill>
@@ -4629,7 +4651,7 @@
           <a:p>
             <a:pPr algn="ctr"/>
             <a:r>
-              <a:rPr lang="en-GB" sz="1300" dirty="0">
+              <a:rPr lang="en-GB" sz="1200" dirty="0">
                 <a:solidFill>
                   <a:sysClr val="windowText" lastClr="000000"/>
                 </a:solidFill>
@@ -4690,7 +4712,7 @@
           <a:p>
             <a:pPr algn="ctr"/>
             <a:r>
-              <a:rPr lang="en-GB" sz="1300" dirty="0">
+              <a:rPr lang="en-GB" sz="1200" dirty="0">
                 <a:solidFill>
                   <a:sysClr val="windowText" lastClr="000000"/>
                 </a:solidFill>
@@ -4701,7 +4723,7 @@
           <a:p>
             <a:pPr algn="ctr"/>
             <a:r>
-              <a:rPr lang="en-GB" sz="1300" dirty="0">
+              <a:rPr lang="en-GB" sz="1200" dirty="0">
                 <a:solidFill>
                   <a:sysClr val="windowText" lastClr="000000"/>
                 </a:solidFill>
@@ -4712,7 +4734,7 @@
           <a:p>
             <a:pPr algn="ctr"/>
             <a:r>
-              <a:rPr lang="en-GB" sz="1300" dirty="0">
+              <a:rPr lang="en-GB" sz="1200" dirty="0">
                 <a:solidFill>
                   <a:sysClr val="windowText" lastClr="000000"/>
                 </a:solidFill>
@@ -4773,7 +4795,7 @@
           <a:p>
             <a:pPr algn="ctr"/>
             <a:r>
-              <a:rPr lang="en-GB" sz="1300" dirty="0">
+              <a:rPr lang="en-GB" sz="1200" dirty="0">
                 <a:solidFill>
                   <a:sysClr val="windowText" lastClr="000000"/>
                 </a:solidFill>
@@ -4784,7 +4806,7 @@
           <a:p>
             <a:pPr algn="ctr"/>
             <a:r>
-              <a:rPr lang="en-GB" sz="1300" dirty="0">
+              <a:rPr lang="en-GB" sz="1200" dirty="0">
                 <a:solidFill>
                   <a:sysClr val="windowText" lastClr="000000"/>
                 </a:solidFill>
@@ -4845,7 +4867,7 @@
           <a:p>
             <a:pPr algn="ctr"/>
             <a:r>
-              <a:rPr lang="en-GB" sz="1300" dirty="0">
+              <a:rPr lang="en-GB" sz="1200" dirty="0">
                 <a:solidFill>
                   <a:sysClr val="windowText" lastClr="000000"/>
                 </a:solidFill>
@@ -4856,7 +4878,7 @@
           <a:p>
             <a:pPr algn="ctr"/>
             <a:r>
-              <a:rPr lang="en-GB" sz="1300" dirty="0">
+              <a:rPr lang="en-GB" sz="1200" dirty="0">
                 <a:solidFill>
                   <a:sysClr val="windowText" lastClr="000000"/>
                 </a:solidFill>
@@ -4867,7 +4889,7 @@
           <a:p>
             <a:pPr algn="ctr"/>
             <a:r>
-              <a:rPr lang="en-GB" sz="1300" dirty="0">
+              <a:rPr lang="en-GB" sz="1200" dirty="0">
                 <a:solidFill>
                   <a:sysClr val="windowText" lastClr="000000"/>
                 </a:solidFill>
@@ -4928,7 +4950,7 @@
           <a:p>
             <a:pPr algn="ctr"/>
             <a:r>
-              <a:rPr lang="en-GB" sz="1300" dirty="0">
+              <a:rPr lang="en-GB" sz="1200" dirty="0">
                 <a:solidFill>
                   <a:sysClr val="windowText" lastClr="000000"/>
                 </a:solidFill>
@@ -4939,7 +4961,7 @@
           <a:p>
             <a:pPr algn="ctr"/>
             <a:r>
-              <a:rPr lang="en-GB" sz="1300" dirty="0">
+              <a:rPr lang="en-GB" sz="1200" dirty="0">
                 <a:solidFill>
                   <a:sysClr val="windowText" lastClr="000000"/>
                 </a:solidFill>
@@ -4950,7 +4972,7 @@
           <a:p>
             <a:pPr algn="ctr"/>
             <a:r>
-              <a:rPr lang="en-GB" sz="1300" dirty="0">
+              <a:rPr lang="en-GB" sz="1200" dirty="0">
                 <a:solidFill>
                   <a:sysClr val="windowText" lastClr="000000"/>
                 </a:solidFill>
@@ -5011,7 +5033,7 @@
           <a:p>
             <a:pPr algn="ctr"/>
             <a:r>
-              <a:rPr lang="en-GB" sz="1300" dirty="0">
+              <a:rPr lang="en-GB" sz="1200" dirty="0">
                 <a:solidFill>
                   <a:sysClr val="windowText" lastClr="000000"/>
                 </a:solidFill>
@@ -5022,7 +5044,7 @@
           <a:p>
             <a:pPr algn="ctr"/>
             <a:r>
-              <a:rPr lang="en-GB" sz="1300" dirty="0">
+              <a:rPr lang="en-GB" sz="1200" dirty="0">
                 <a:solidFill>
                   <a:sysClr val="windowText" lastClr="000000"/>
                 </a:solidFill>
@@ -5083,7 +5105,7 @@
           <a:p>
             <a:pPr algn="ctr"/>
             <a:r>
-              <a:rPr lang="en-GB" sz="1300" dirty="0">
+              <a:rPr lang="en-GB" sz="1200" dirty="0">
                 <a:solidFill>
                   <a:sysClr val="windowText" lastClr="000000"/>
                 </a:solidFill>
@@ -5094,7 +5116,7 @@
           <a:p>
             <a:pPr algn="ctr"/>
             <a:r>
-              <a:rPr lang="en-GB" sz="1300" dirty="0">
+              <a:rPr lang="en-GB" sz="1200" dirty="0">
                 <a:solidFill>
                   <a:sysClr val="windowText" lastClr="000000"/>
                 </a:solidFill>
@@ -5105,7 +5127,7 @@
           <a:p>
             <a:pPr algn="ctr"/>
             <a:r>
-              <a:rPr lang="en-GB" sz="1300" dirty="0">
+              <a:rPr lang="en-GB" sz="1200" dirty="0">
                 <a:solidFill>
                   <a:sysClr val="windowText" lastClr="000000"/>
                 </a:solidFill>
@@ -5166,7 +5188,7 @@
           <a:p>
             <a:pPr algn="ctr"/>
             <a:r>
-              <a:rPr lang="en-GB" sz="1300" dirty="0">
+              <a:rPr lang="en-GB" sz="1200" dirty="0">
                 <a:solidFill>
                   <a:sysClr val="windowText" lastClr="000000"/>
                 </a:solidFill>
@@ -5177,7 +5199,7 @@
           <a:p>
             <a:pPr algn="ctr"/>
             <a:r>
-              <a:rPr lang="en-GB" sz="1300" dirty="0">
+              <a:rPr lang="en-GB" sz="1200" dirty="0">
                 <a:solidFill>
                   <a:sysClr val="windowText" lastClr="000000"/>
                 </a:solidFill>
@@ -5188,7 +5210,7 @@
           <a:p>
             <a:pPr algn="ctr"/>
             <a:r>
-              <a:rPr lang="en-GB" sz="1300" dirty="0">
+              <a:rPr lang="en-GB" sz="1200" dirty="0">
                 <a:solidFill>
                   <a:sysClr val="windowText" lastClr="000000"/>
                 </a:solidFill>
@@ -5249,7 +5271,7 @@
           <a:p>
             <a:pPr algn="ctr"/>
             <a:r>
-              <a:rPr lang="en-GB" sz="1300" dirty="0">
+              <a:rPr lang="en-GB" sz="1200" dirty="0">
                 <a:solidFill>
                   <a:sysClr val="windowText" lastClr="000000"/>
                 </a:solidFill>
